--- a/Projetos de Software/Aula 06 - Introdução à POO/Introdução ao POO.pptx
+++ b/Projetos de Software/Aula 06 - Introdução à POO/Introdução ao POO.pptx
@@ -248,7 +248,7 @@
           <a:p>
             <a:fld id="{FCBB45FB-FC1C-4893-B550-48C1193193C6}" type="datetimeFigureOut">
               <a:rPr lang="pt-BR" smtClean="0"/>
-              <a:t>04/08/2025</a:t>
+              <a:t>11/08/2025</a:t>
             </a:fld>
             <a:endParaRPr lang="pt-BR"/>
           </a:p>
@@ -951,7 +951,7 @@
           <a:p>
             <a:fld id="{CDD55C27-F8C6-4481-8569-CAC50CAE9F1F}" type="datetimeFigureOut">
               <a:rPr lang="pt-BR" smtClean="0"/>
-              <a:t>04/08/2025</a:t>
+              <a:t>11/08/2025</a:t>
             </a:fld>
             <a:endParaRPr lang="pt-BR"/>
           </a:p>
@@ -1441,7 +1441,7 @@
           <a:p>
             <a:fld id="{CDD55C27-F8C6-4481-8569-CAC50CAE9F1F}" type="datetimeFigureOut">
               <a:rPr lang="pt-BR" smtClean="0"/>
-              <a:t>04/08/2025</a:t>
+              <a:t>11/08/2025</a:t>
             </a:fld>
             <a:endParaRPr lang="pt-BR"/>
           </a:p>
@@ -1744,7 +1744,7 @@
           <a:p>
             <a:fld id="{CDD55C27-F8C6-4481-8569-CAC50CAE9F1F}" type="datetimeFigureOut">
               <a:rPr lang="pt-BR" smtClean="0"/>
-              <a:t>04/08/2025</a:t>
+              <a:t>11/08/2025</a:t>
             </a:fld>
             <a:endParaRPr lang="pt-BR"/>
           </a:p>
@@ -2195,7 +2195,7 @@
           <a:p>
             <a:fld id="{CDD55C27-F8C6-4481-8569-CAC50CAE9F1F}" type="datetimeFigureOut">
               <a:rPr lang="pt-BR" smtClean="0"/>
-              <a:t>04/08/2025</a:t>
+              <a:t>11/08/2025</a:t>
             </a:fld>
             <a:endParaRPr lang="pt-BR"/>
           </a:p>
@@ -2368,7 +2368,7 @@
           <a:p>
             <a:fld id="{CDD55C27-F8C6-4481-8569-CAC50CAE9F1F}" type="datetimeFigureOut">
               <a:rPr lang="pt-BR" smtClean="0"/>
-              <a:t>04/08/2025</a:t>
+              <a:t>11/08/2025</a:t>
             </a:fld>
             <a:endParaRPr lang="pt-BR"/>
           </a:p>
@@ -2505,7 +2505,7 @@
           <a:p>
             <a:fld id="{CDD55C27-F8C6-4481-8569-CAC50CAE9F1F}" type="datetimeFigureOut">
               <a:rPr lang="pt-BR" smtClean="0"/>
-              <a:t>04/08/2025</a:t>
+              <a:t>11/08/2025</a:t>
             </a:fld>
             <a:endParaRPr lang="pt-BR"/>
           </a:p>
@@ -2849,7 +2849,7 @@
           <a:p>
             <a:fld id="{CDD55C27-F8C6-4481-8569-CAC50CAE9F1F}" type="datetimeFigureOut">
               <a:rPr lang="pt-BR" smtClean="0"/>
-              <a:t>04/08/2025</a:t>
+              <a:t>11/08/2025</a:t>
             </a:fld>
             <a:endParaRPr lang="pt-BR"/>
           </a:p>
@@ -3170,7 +3170,7 @@
           <a:p>
             <a:fld id="{CDD55C27-F8C6-4481-8569-CAC50CAE9F1F}" type="datetimeFigureOut">
               <a:rPr lang="pt-BR" smtClean="0"/>
-              <a:t>04/08/2025</a:t>
+              <a:t>11/08/2025</a:t>
             </a:fld>
             <a:endParaRPr lang="pt-BR"/>
           </a:p>
